--- a/과제_2주차/2주차_과제_종로밀도_스마트공원.pptx
+++ b/과제_2주차/2주차_과제_종로밀도_스마트공원.pptx
@@ -11862,7 +11862,7 @@
                           <a:latin typeface="Malgun Gothic"/>
                           <a:ea typeface="Malgun Gothic"/>
                         </a:rPr>
-                        <a:t>과제2주차_산출물.pdf 1쪽</a:t>
+                        <a:t>PDF 1쪽</a:t>
                       </a:r>
                     </a:p>
                   </a:txBody>
@@ -12932,10 +12932,11 @@
             <a:r>
               <a:rPr sz="950" b="0" i="0" lang="ko-KR">
                 <a:solidFill>
-                  <a:srgbClr val="262B33"/>
+                  <a:srgbClr val="1F4E9C"/>
                 </a:solidFill>
                 <a:latin typeface="Malgun Gothic"/>
                 <a:ea typeface="Malgun Gothic"/>
+                <a:hlinkClick r:id="rId2"/>
               </a:rPr>
               <a:t>github.com/choemyeongwon1-ui/kaya</a:t>
             </a:r>
@@ -12954,7 +12955,35 @@
                 <a:latin typeface="Malgun Gothic"/>
                 <a:ea typeface="Malgun Gothic"/>
               </a:rPr>
-              <a:t>2주차 산출물과 대시보드를 팀이 함께 관리하는 저장소</a:t>
+              <a:t>과제 PDF 바로 열기 → </a:t>
+            </a:r>
+            <a:r>
+              <a:rPr sz="950" b="0" i="0" lang="ko-KR">
+                <a:solidFill>
+                  <a:srgbClr val="1F4E9C"/>
+                </a:solidFill>
+                <a:latin typeface="Malgun Gothic"/>
+                <a:ea typeface="Malgun Gothic"/>
+                <a:hlinkClick r:id="rId3"/>
+              </a:rPr>
+              <a:t>2주차_과제_종로밀도_스마트공원.pdf</a:t>
+            </a:r>
+          </a:p>
+          <a:p>
+            <a:pPr algn="l" eaLnBrk="0">
+              <a:lnSpc>
+                <a:spcPct val="115000"/>
+              </a:lnSpc>
+            </a:pPr>
+            <a:r>
+              <a:rPr sz="950" b="0" i="0" lang="ko-KR">
+                <a:solidFill>
+                  <a:srgbClr val="262B33"/>
+                </a:solidFill>
+                <a:latin typeface="Malgun Gothic"/>
+                <a:ea typeface="Malgun Gothic"/>
+              </a:rPr>
+              <a:t>표 CSV 원본과 재현 스크립트도 같은 폴더에 있음</a:t>
             </a:r>
           </a:p>
         </p:txBody>
